--- a/demo-slides.pptx
+++ b/demo-slides.pptx
@@ -2,18 +2,18 @@
 <file path=ppt/presentation.xml><?xml version="1.0" encoding="utf-8"?>
 <p:presentation xmlns:p="http://schemas.openxmlformats.org/presentationml/2006/main">
   <p:sldMasterIdLst>
-    <p:sldMasterId xmlns:r="http://schemas.openxmlformats.org/officeDocument/2006/relationships" id="2147483648" r:id="R4141c9aececb4d12"/>
+    <p:sldMasterId xmlns:r="http://schemas.openxmlformats.org/officeDocument/2006/relationships" id="2147483648" r:id="Ra1e2906248f448d2"/>
   </p:sldMasterIdLst>
   <p:notesMasterIdLst>
-    <p:notesMasterId xmlns:r="http://schemas.openxmlformats.org/officeDocument/2006/relationships" r:id="R48157fdd406d4508"/>
+    <p:notesMasterId xmlns:r="http://schemas.openxmlformats.org/officeDocument/2006/relationships" r:id="Rddb942f496574022"/>
   </p:notesMasterIdLst>
   <p:sldIdLst>
-    <p:sldId xmlns:r="http://schemas.openxmlformats.org/officeDocument/2006/relationships" id="256" r:id="R6432811a90634681"/>
-    <p:sldId xmlns:r="http://schemas.openxmlformats.org/officeDocument/2006/relationships" id="257" r:id="R439269ce91034ea3"/>
-    <p:sldId xmlns:r="http://schemas.openxmlformats.org/officeDocument/2006/relationships" id="258" r:id="Rf44802dcee0348a9"/>
-    <p:sldId xmlns:r="http://schemas.openxmlformats.org/officeDocument/2006/relationships" id="259" r:id="R7623adac090f4dd7"/>
-    <p:sldId xmlns:r="http://schemas.openxmlformats.org/officeDocument/2006/relationships" id="260" r:id="R9acf51b84d8c4167"/>
-    <p:sldId xmlns:r="http://schemas.openxmlformats.org/officeDocument/2006/relationships" id="261" r:id="Rb565b93a21b6473d"/>
+    <p:sldId xmlns:r="http://schemas.openxmlformats.org/officeDocument/2006/relationships" id="256" r:id="R5e718e4cc9ca4187"/>
+    <p:sldId xmlns:r="http://schemas.openxmlformats.org/officeDocument/2006/relationships" id="257" r:id="R49e195f4acc9459a"/>
+    <p:sldId xmlns:r="http://schemas.openxmlformats.org/officeDocument/2006/relationships" id="258" r:id="R458a315965e3408e"/>
+    <p:sldId xmlns:r="http://schemas.openxmlformats.org/officeDocument/2006/relationships" id="259" r:id="R2d50d66594094965"/>
+    <p:sldId xmlns:r="http://schemas.openxmlformats.org/officeDocument/2006/relationships" id="260" r:id="Ra11f8ebfb5fc4816"/>
+    <p:sldId xmlns:r="http://schemas.openxmlformats.org/officeDocument/2006/relationships" id="261" r:id="R9a1982e4a4664b7b"/>
   </p:sldIdLst>
   <p:sldSz cx="12192000" cy="6858000"/>
   <p:notesSz cx="6858000" cy="9144000"/>
@@ -852,12 +852,22 @@
           <a:lstStyle xmlns:a="http://schemas.openxmlformats.org/drawingml/2006/main"/>
           <a:p xmlns:a="http://schemas.openxmlformats.org/drawingml/2006/main">
             <a:r>
-              <a:t>Đây là slide blocker có chủ đích: tuyệt đối không trình bày placeholder như feedback thật.</a:t>
-            </a:r>
-          </a:p>
-          <a:p xmlns:a="http://schemas.openxmlformats.org/drawingml/2006/main">
-            <a:r>
-              <a:t>Sau 5 buổi test, thay 0/5, hai quote và quyết định thay đổi.</a:t>
+              <a:t>Kết quả thử với 5 người ngoài nhóm: 4/5 tự hoàn thành, 5/5 tin hoặc khá tin, 5/5 nói sẽ dùng thật.</a:t>
+            </a:r>
+          </a:p>
+          <a:p xmlns:a="http://schemas.openxmlformats.org/drawingml/2006/main">
+            <a:r>
+              <a:t>Hai lỗi rõ nhất là nút Kiểm tra tôi chưa nổi bật và các nhãn mastery khó phân biệt.</a:t>
+            </a:r>
+          </a:p>
+          <a:p xmlns:a="http://schemas.openxmlformats.org/drawingml/2006/main">
+            <a:r>
+              <a:t>Nhóm đã sửa trực tiếp hai điểm này trước demo.</a:t>
+            </a:r>
+          </a:p>
+          <a:p xmlns:a="http://schemas.openxmlformats.org/drawingml/2006/main">
+            <a:r>
+              <a:t>Dry run hiện là 5 phút 08 giây, vì vậy câu trả lời CP5 là đã chạy nhưng quá giờ.</a:t>
             </a:r>
           </a:p>
           <a:p xmlns:a="http://schemas.openxmlformats.org/drawingml/2006/main">
@@ -872,17 +882,17 @@
           </a:p>
           <a:p xmlns:a="http://schemas.openxmlformats.org/drawingml/2006/main">
             <a:r>
-              <a:t>- 02-guide.md §4.2–4.3 và §5.1</a:t>
-            </a:r>
-          </a:p>
-          <a:p xmlns:a="http://schemas.openxmlformats.org/drawingml/2006/main">
-            <a:r>
               <a:t>- validation/feedback-log.md</a:t>
             </a:r>
           </a:p>
           <a:p xmlns:a="http://schemas.openxmlformats.org/drawingml/2006/main">
             <a:r>
               <a:t>- validation/summary.md</a:t>
+            </a:r>
+          </a:p>
+          <a:p xmlns:a="http://schemas.openxmlformats.org/drawingml/2006/main">
+            <a:r>
+              <a:t>- validation/dry-run.md</a:t>
             </a:r>
           </a:p>
           <a:p xmlns:a="http://schemas.openxmlformats.org/drawingml/2006/main">
@@ -1060,7 +1070,7 @@
   </p:cSld>
   <p:clrMap bg1="lt1" tx1="dk1" bg2="lt2" tx2="dk2" accent1="accent1" accent2="accent2" accent3="accent3" accent4="accent4" accent5="accent5" accent6="accent6" hlink="hlink" folHlink="folHlink"/>
   <p:sldLayoutIdLst>
-    <p:sldLayoutId xmlns:r="http://schemas.openxmlformats.org/officeDocument/2006/relationships" id="2147483649" r:id="R280a6cbb40bb4524"/>
+    <p:sldLayoutId xmlns:r="http://schemas.openxmlformats.org/officeDocument/2006/relationships" id="2147483649" r:id="Rea90a5c231ff4a93"/>
   </p:sldLayoutIdLst>
   <p:txStyles>
     <p:titleStyle>
@@ -1672,6 +1682,7 @@
           <a:lstStyle xmlns:a="http://schemas.openxmlformats.org/drawingml/2006/main"/>
           <a:p xmlns:a="http://schemas.openxmlformats.org/drawingml/2006/main">
             <a:pPr algn="ctr">
+              <a:buNone/>
               <a:defRPr sz="1050" b="1">
                 <a:solidFill>
                   <a:srgbClr val="0B1628"/>
@@ -1722,6 +1733,7 @@
           <a:lstStyle xmlns:a="http://schemas.openxmlformats.org/drawingml/2006/main"/>
           <a:p xmlns:a="http://schemas.openxmlformats.org/drawingml/2006/main">
             <a:pPr algn="l">
+              <a:buNone/>
               <a:defRPr sz="3750" b="1">
                 <a:solidFill>
                   <a:srgbClr val="FFFFFF"/>
@@ -1739,6 +1751,7 @@
           </a:p>
           <a:p xmlns:a="http://schemas.openxmlformats.org/drawingml/2006/main">
             <a:pPr algn="l">
+              <a:buNone/>
               <a:defRPr sz="3750" b="1">
                 <a:solidFill>
                   <a:srgbClr val="FFFFFF"/>
@@ -1789,6 +1802,7 @@
           <a:lstStyle xmlns:a="http://schemas.openxmlformats.org/drawingml/2006/main"/>
           <a:p xmlns:a="http://schemas.openxmlformats.org/drawingml/2006/main">
             <a:pPr algn="l">
+              <a:buNone/>
               <a:defRPr sz="1800" b="0">
                 <a:solidFill>
                   <a:srgbClr val="B9F4ED"/>
@@ -1872,6 +1886,7 @@
           <a:lstStyle xmlns:a="http://schemas.openxmlformats.org/drawingml/2006/main"/>
           <a:p xmlns:a="http://schemas.openxmlformats.org/drawingml/2006/main">
             <a:pPr algn="l">
+              <a:buNone/>
               <a:defRPr sz="1050" b="1">
                 <a:solidFill>
                   <a:srgbClr val="64748B"/>
@@ -1922,6 +1937,7 @@
           <a:lstStyle xmlns:a="http://schemas.openxmlformats.org/drawingml/2006/main"/>
           <a:p xmlns:a="http://schemas.openxmlformats.org/drawingml/2006/main">
             <a:pPr algn="l">
+              <a:buNone/>
               <a:defRPr sz="5250" b="1">
                 <a:solidFill>
                   <a:srgbClr val="0B1628"/>
@@ -1972,6 +1988,7 @@
           <a:lstStyle xmlns:a="http://schemas.openxmlformats.org/drawingml/2006/main"/>
           <a:p xmlns:a="http://schemas.openxmlformats.org/drawingml/2006/main">
             <a:pPr algn="l">
+              <a:buNone/>
               <a:defRPr sz="1575" b="1">
                 <a:solidFill>
                   <a:srgbClr val="0B1628"/>
@@ -1989,6 +2006,7 @@
           </a:p>
           <a:p xmlns:a="http://schemas.openxmlformats.org/drawingml/2006/main">
             <a:pPr algn="l">
+              <a:buNone/>
               <a:defRPr sz="1575" b="1">
                 <a:solidFill>
                   <a:srgbClr val="0B1628"/>
@@ -2070,6 +2088,7 @@
           <a:lstStyle xmlns:a="http://schemas.openxmlformats.org/drawingml/2006/main"/>
           <a:p xmlns:a="http://schemas.openxmlformats.org/drawingml/2006/main">
             <a:pPr algn="l">
+              <a:buNone/>
               <a:defRPr sz="3750" b="1">
                 <a:solidFill>
                   <a:srgbClr val="FF9B5E"/>
@@ -2120,6 +2139,7 @@
           <a:lstStyle xmlns:a="http://schemas.openxmlformats.org/drawingml/2006/main"/>
           <a:p xmlns:a="http://schemas.openxmlformats.org/drawingml/2006/main">
             <a:pPr algn="l">
+              <a:buNone/>
               <a:defRPr sz="1350" b="0">
                 <a:solidFill>
                   <a:srgbClr val="64748B"/>
@@ -2137,6 +2157,7 @@
           </a:p>
           <a:p xmlns:a="http://schemas.openxmlformats.org/drawingml/2006/main">
             <a:pPr algn="l">
+              <a:buNone/>
               <a:defRPr sz="1350" b="0">
                 <a:solidFill>
                   <a:srgbClr val="64748B"/>
@@ -2220,6 +2241,7 @@
           <a:lstStyle xmlns:a="http://schemas.openxmlformats.org/drawingml/2006/main"/>
           <a:p xmlns:a="http://schemas.openxmlformats.org/drawingml/2006/main">
             <a:pPr algn="ctr">
+              <a:buNone/>
               <a:defRPr sz="1050" b="1">
                 <a:solidFill>
                   <a:srgbClr val="0B1628"/>
@@ -2270,6 +2292,7 @@
           <a:lstStyle xmlns:a="http://schemas.openxmlformats.org/drawingml/2006/main"/>
           <a:p xmlns:a="http://schemas.openxmlformats.org/drawingml/2006/main">
             <a:pPr algn="l">
+              <a:buNone/>
               <a:defRPr sz="1050" b="1">
                 <a:solidFill>
                   <a:srgbClr val="33D6C5"/>
@@ -2320,6 +2343,7 @@
           <a:lstStyle xmlns:a="http://schemas.openxmlformats.org/drawingml/2006/main"/>
           <a:p xmlns:a="http://schemas.openxmlformats.org/drawingml/2006/main">
             <a:pPr algn="l">
+              <a:buNone/>
               <a:defRPr sz="2100" b="1">
                 <a:solidFill>
                   <a:srgbClr val="FFFFFF"/>
@@ -2370,6 +2394,7 @@
           <a:lstStyle xmlns:a="http://schemas.openxmlformats.org/drawingml/2006/main"/>
           <a:p xmlns:a="http://schemas.openxmlformats.org/drawingml/2006/main">
             <a:pPr algn="l">
+              <a:buNone/>
               <a:defRPr sz="900" b="0">
                 <a:solidFill>
                   <a:srgbClr val="92A5BE"/>
@@ -2482,6 +2507,7 @@
           <a:lstStyle xmlns:a="http://schemas.openxmlformats.org/drawingml/2006/main"/>
           <a:p xmlns:a="http://schemas.openxmlformats.org/drawingml/2006/main">
             <a:pPr algn="ctr">
+              <a:buNone/>
               <a:defRPr sz="1050" b="1">
                 <a:solidFill>
                   <a:srgbClr val="FFFFFF"/>
@@ -2532,6 +2558,7 @@
           <a:lstStyle xmlns:a="http://schemas.openxmlformats.org/drawingml/2006/main"/>
           <a:p xmlns:a="http://schemas.openxmlformats.org/drawingml/2006/main">
             <a:pPr algn="l">
+              <a:buNone/>
               <a:defRPr sz="1050" b="1">
                 <a:solidFill>
                   <a:srgbClr val="64748B"/>
@@ -2582,6 +2609,7 @@
           <a:lstStyle xmlns:a="http://schemas.openxmlformats.org/drawingml/2006/main"/>
           <a:p xmlns:a="http://schemas.openxmlformats.org/drawingml/2006/main">
             <a:pPr algn="l">
+              <a:buNone/>
               <a:defRPr sz="2850" b="1">
                 <a:solidFill>
                   <a:srgbClr val="0B1628"/>
@@ -2632,6 +2660,7 @@
           <a:lstStyle xmlns:a="http://schemas.openxmlformats.org/drawingml/2006/main"/>
           <a:p xmlns:a="http://schemas.openxmlformats.org/drawingml/2006/main">
             <a:pPr algn="l">
+              <a:buNone/>
               <a:defRPr sz="1350" b="0">
                 <a:solidFill>
                   <a:srgbClr val="64748B"/>
@@ -2750,6 +2779,7 @@
           <a:lstStyle xmlns:a="http://schemas.openxmlformats.org/drawingml/2006/main"/>
           <a:p xmlns:a="http://schemas.openxmlformats.org/drawingml/2006/main">
             <a:pPr algn="ctr">
+              <a:buNone/>
               <a:defRPr sz="1050" b="1">
                 <a:solidFill>
                   <a:srgbClr val="FFFFFF"/>
@@ -2800,6 +2830,7 @@
           <a:lstStyle xmlns:a="http://schemas.openxmlformats.org/drawingml/2006/main"/>
           <a:p xmlns:a="http://schemas.openxmlformats.org/drawingml/2006/main">
             <a:pPr algn="l">
+              <a:buNone/>
               <a:defRPr sz="1950" b="1">
                 <a:solidFill>
                   <a:srgbClr val="0B1628"/>
@@ -2850,6 +2881,7 @@
           <a:lstStyle xmlns:a="http://schemas.openxmlformats.org/drawingml/2006/main"/>
           <a:p xmlns:a="http://schemas.openxmlformats.org/drawingml/2006/main">
             <a:pPr algn="l">
+              <a:buNone/>
               <a:defRPr sz="3300" b="1">
                 <a:solidFill>
                   <a:srgbClr val="64748B"/>
@@ -2900,6 +2932,7 @@
           <a:lstStyle xmlns:a="http://schemas.openxmlformats.org/drawingml/2006/main"/>
           <a:p xmlns:a="http://schemas.openxmlformats.org/drawingml/2006/main">
             <a:pPr algn="l">
+              <a:buNone/>
               <a:defRPr sz="1575" b="0">
                 <a:solidFill>
                   <a:srgbClr val="64748B"/>
@@ -2917,6 +2950,7 @@
           </a:p>
           <a:p xmlns:a="http://schemas.openxmlformats.org/drawingml/2006/main">
             <a:pPr algn="l">
+              <a:buNone/>
               <a:defRPr sz="1575" b="0">
                 <a:solidFill>
                   <a:srgbClr val="64748B"/>
@@ -3035,6 +3069,7 @@
           <a:lstStyle xmlns:a="http://schemas.openxmlformats.org/drawingml/2006/main"/>
           <a:p xmlns:a="http://schemas.openxmlformats.org/drawingml/2006/main">
             <a:pPr algn="ctr">
+              <a:buNone/>
               <a:defRPr sz="1050" b="1">
                 <a:solidFill>
                   <a:srgbClr val="FFFFFF"/>
@@ -3085,6 +3120,7 @@
           <a:lstStyle xmlns:a="http://schemas.openxmlformats.org/drawingml/2006/main"/>
           <a:p xmlns:a="http://schemas.openxmlformats.org/drawingml/2006/main">
             <a:pPr algn="l">
+              <a:buNone/>
               <a:defRPr sz="1950" b="1">
                 <a:solidFill>
                   <a:srgbClr val="0B1628"/>
@@ -3135,6 +3171,7 @@
           <a:lstStyle xmlns:a="http://schemas.openxmlformats.org/drawingml/2006/main"/>
           <a:p xmlns:a="http://schemas.openxmlformats.org/drawingml/2006/main">
             <a:pPr algn="l">
+              <a:buNone/>
               <a:defRPr sz="3300" b="1">
                 <a:solidFill>
                   <a:srgbClr val="FF9B5E"/>
@@ -3185,6 +3222,7 @@
           <a:lstStyle xmlns:a="http://schemas.openxmlformats.org/drawingml/2006/main"/>
           <a:p xmlns:a="http://schemas.openxmlformats.org/drawingml/2006/main">
             <a:pPr algn="l">
+              <a:buNone/>
               <a:defRPr sz="1575" b="0">
                 <a:solidFill>
                   <a:srgbClr val="64748B"/>
@@ -3202,6 +3240,7 @@
           </a:p>
           <a:p xmlns:a="http://schemas.openxmlformats.org/drawingml/2006/main">
             <a:pPr algn="l">
+              <a:buNone/>
               <a:defRPr sz="1575" b="0">
                 <a:solidFill>
                   <a:srgbClr val="64748B"/>
@@ -3320,6 +3359,7 @@
           <a:lstStyle xmlns:a="http://schemas.openxmlformats.org/drawingml/2006/main"/>
           <a:p xmlns:a="http://schemas.openxmlformats.org/drawingml/2006/main">
             <a:pPr algn="ctr">
+              <a:buNone/>
               <a:defRPr sz="1050" b="1">
                 <a:solidFill>
                   <a:srgbClr val="0B1628"/>
@@ -3370,6 +3410,7 @@
           <a:lstStyle xmlns:a="http://schemas.openxmlformats.org/drawingml/2006/main"/>
           <a:p xmlns:a="http://schemas.openxmlformats.org/drawingml/2006/main">
             <a:pPr algn="l">
+              <a:buNone/>
               <a:defRPr sz="1950" b="1">
                 <a:solidFill>
                   <a:srgbClr val="FFFFFF"/>
@@ -3420,6 +3461,7 @@
           <a:lstStyle xmlns:a="http://schemas.openxmlformats.org/drawingml/2006/main"/>
           <a:p xmlns:a="http://schemas.openxmlformats.org/drawingml/2006/main">
             <a:pPr algn="l">
+              <a:buNone/>
               <a:defRPr sz="3300" b="1">
                 <a:solidFill>
                   <a:srgbClr val="33D6C5"/>
@@ -3470,6 +3512,7 @@
           <a:lstStyle xmlns:a="http://schemas.openxmlformats.org/drawingml/2006/main"/>
           <a:p xmlns:a="http://schemas.openxmlformats.org/drawingml/2006/main">
             <a:pPr algn="l">
+              <a:buNone/>
               <a:defRPr sz="1575" b="0">
                 <a:solidFill>
                   <a:srgbClr val="B9F4ED"/>
@@ -3487,6 +3530,7 @@
           </a:p>
           <a:p xmlns:a="http://schemas.openxmlformats.org/drawingml/2006/main">
             <a:pPr algn="l">
+              <a:buNone/>
               <a:defRPr sz="1575" b="0">
                 <a:solidFill>
                   <a:srgbClr val="B9F4ED"/>
@@ -3537,6 +3581,7 @@
           <a:lstStyle xmlns:a="http://schemas.openxmlformats.org/drawingml/2006/main"/>
           <a:p xmlns:a="http://schemas.openxmlformats.org/drawingml/2006/main">
             <a:pPr algn="l">
+              <a:buNone/>
               <a:defRPr sz="900" b="0">
                 <a:solidFill>
                   <a:srgbClr val="64748B"/>
@@ -3649,6 +3694,7 @@
           <a:lstStyle xmlns:a="http://schemas.openxmlformats.org/drawingml/2006/main"/>
           <a:p xmlns:a="http://schemas.openxmlformats.org/drawingml/2006/main">
             <a:pPr algn="ctr">
+              <a:buNone/>
               <a:defRPr sz="1050" b="1">
                 <a:solidFill>
                   <a:srgbClr val="FFFFFF"/>
@@ -3699,6 +3745,7 @@
           <a:lstStyle xmlns:a="http://schemas.openxmlformats.org/drawingml/2006/main"/>
           <a:p xmlns:a="http://schemas.openxmlformats.org/drawingml/2006/main">
             <a:pPr algn="l">
+              <a:buNone/>
               <a:defRPr sz="1050" b="1">
                 <a:solidFill>
                   <a:srgbClr val="64748B"/>
@@ -3749,6 +3796,7 @@
           <a:lstStyle xmlns:a="http://schemas.openxmlformats.org/drawingml/2006/main"/>
           <a:p xmlns:a="http://schemas.openxmlformats.org/drawingml/2006/main">
             <a:pPr algn="l">
+              <a:buNone/>
               <a:defRPr sz="2850" b="1">
                 <a:solidFill>
                   <a:srgbClr val="0B1628"/>
@@ -3799,6 +3847,7 @@
           <a:lstStyle xmlns:a="http://schemas.openxmlformats.org/drawingml/2006/main"/>
           <a:p xmlns:a="http://schemas.openxmlformats.org/drawingml/2006/main">
             <a:pPr algn="l">
+              <a:buNone/>
               <a:defRPr sz="1350" b="0">
                 <a:solidFill>
                   <a:srgbClr val="64748B"/>
@@ -3917,6 +3966,7 @@
           <a:lstStyle xmlns:a="http://schemas.openxmlformats.org/drawingml/2006/main"/>
           <a:p xmlns:a="http://schemas.openxmlformats.org/drawingml/2006/main">
             <a:pPr algn="ctr">
+              <a:buNone/>
               <a:defRPr sz="1050" b="1">
                 <a:solidFill>
                   <a:srgbClr val="0B1628"/>
@@ -3967,6 +4017,7 @@
           <a:lstStyle xmlns:a="http://schemas.openxmlformats.org/drawingml/2006/main"/>
           <a:p xmlns:a="http://schemas.openxmlformats.org/drawingml/2006/main">
             <a:pPr algn="l">
+              <a:buNone/>
               <a:defRPr sz="1800" b="1">
                 <a:solidFill>
                   <a:srgbClr val="0B1628"/>
@@ -4017,6 +4068,7 @@
           <a:lstStyle xmlns:a="http://schemas.openxmlformats.org/drawingml/2006/main"/>
           <a:p xmlns:a="http://schemas.openxmlformats.org/drawingml/2006/main">
             <a:pPr algn="l">
+              <a:buNone/>
               <a:defRPr sz="1275" b="0">
                 <a:solidFill>
                   <a:srgbClr val="64748B"/>
@@ -4067,6 +4119,7 @@
           <a:lstStyle xmlns:a="http://schemas.openxmlformats.org/drawingml/2006/main"/>
           <a:p xmlns:a="http://schemas.openxmlformats.org/drawingml/2006/main">
             <a:pPr algn="ctr">
+              <a:buNone/>
               <a:defRPr sz="2100" b="1">
                 <a:solidFill>
                   <a:srgbClr val="64748B"/>
@@ -4185,6 +4238,7 @@
           <a:lstStyle xmlns:a="http://schemas.openxmlformats.org/drawingml/2006/main"/>
           <a:p xmlns:a="http://schemas.openxmlformats.org/drawingml/2006/main">
             <a:pPr algn="ctr">
+              <a:buNone/>
               <a:defRPr sz="1050" b="1">
                 <a:solidFill>
                   <a:srgbClr val="0B1628"/>
@@ -4235,6 +4289,7 @@
           <a:lstStyle xmlns:a="http://schemas.openxmlformats.org/drawingml/2006/main"/>
           <a:p xmlns:a="http://schemas.openxmlformats.org/drawingml/2006/main">
             <a:pPr algn="l">
+              <a:buNone/>
               <a:defRPr sz="1800" b="1">
                 <a:solidFill>
                   <a:srgbClr val="0B1628"/>
@@ -4285,6 +4340,7 @@
           <a:lstStyle xmlns:a="http://schemas.openxmlformats.org/drawingml/2006/main"/>
           <a:p xmlns:a="http://schemas.openxmlformats.org/drawingml/2006/main">
             <a:pPr algn="l">
+              <a:buNone/>
               <a:defRPr sz="1275" b="0">
                 <a:solidFill>
                   <a:srgbClr val="64748B"/>
@@ -4335,6 +4391,7 @@
           <a:lstStyle xmlns:a="http://schemas.openxmlformats.org/drawingml/2006/main"/>
           <a:p xmlns:a="http://schemas.openxmlformats.org/drawingml/2006/main">
             <a:pPr algn="ctr">
+              <a:buNone/>
               <a:defRPr sz="2100" b="1">
                 <a:solidFill>
                   <a:srgbClr val="64748B"/>
@@ -4453,6 +4510,7 @@
           <a:lstStyle xmlns:a="http://schemas.openxmlformats.org/drawingml/2006/main"/>
           <a:p xmlns:a="http://schemas.openxmlformats.org/drawingml/2006/main">
             <a:pPr algn="ctr">
+              <a:buNone/>
               <a:defRPr sz="1050" b="1">
                 <a:solidFill>
                   <a:srgbClr val="0B1628"/>
@@ -4503,6 +4561,7 @@
           <a:lstStyle xmlns:a="http://schemas.openxmlformats.org/drawingml/2006/main"/>
           <a:p xmlns:a="http://schemas.openxmlformats.org/drawingml/2006/main">
             <a:pPr algn="l">
+              <a:buNone/>
               <a:defRPr sz="1800" b="1">
                 <a:solidFill>
                   <a:srgbClr val="FFFFFF"/>
@@ -4553,6 +4612,7 @@
           <a:lstStyle xmlns:a="http://schemas.openxmlformats.org/drawingml/2006/main"/>
           <a:p xmlns:a="http://schemas.openxmlformats.org/drawingml/2006/main">
             <a:pPr algn="l">
+              <a:buNone/>
               <a:defRPr sz="1275" b="0">
                 <a:solidFill>
                   <a:srgbClr val="B9F4ED"/>
@@ -4603,6 +4663,7 @@
           <a:lstStyle xmlns:a="http://schemas.openxmlformats.org/drawingml/2006/main"/>
           <a:p xmlns:a="http://schemas.openxmlformats.org/drawingml/2006/main">
             <a:pPr algn="ctr">
+              <a:buNone/>
               <a:defRPr sz="2100" b="1">
                 <a:solidFill>
                   <a:srgbClr val="64748B"/>
@@ -4721,6 +4782,7 @@
           <a:lstStyle xmlns:a="http://schemas.openxmlformats.org/drawingml/2006/main"/>
           <a:p xmlns:a="http://schemas.openxmlformats.org/drawingml/2006/main">
             <a:pPr algn="ctr">
+              <a:buNone/>
               <a:defRPr sz="1050" b="1">
                 <a:solidFill>
                   <a:srgbClr val="0B1628"/>
@@ -4771,6 +4833,7 @@
           <a:lstStyle xmlns:a="http://schemas.openxmlformats.org/drawingml/2006/main"/>
           <a:p xmlns:a="http://schemas.openxmlformats.org/drawingml/2006/main">
             <a:pPr algn="l">
+              <a:buNone/>
               <a:defRPr sz="1800" b="1">
                 <a:solidFill>
                   <a:srgbClr val="0B1628"/>
@@ -4821,6 +4884,7 @@
           <a:lstStyle xmlns:a="http://schemas.openxmlformats.org/drawingml/2006/main"/>
           <a:p xmlns:a="http://schemas.openxmlformats.org/drawingml/2006/main">
             <a:pPr algn="l">
+              <a:buNone/>
               <a:defRPr sz="1275" b="0">
                 <a:solidFill>
                   <a:srgbClr val="64748B"/>
@@ -4939,6 +5003,7 @@
           <a:lstStyle xmlns:a="http://schemas.openxmlformats.org/drawingml/2006/main"/>
           <a:p xmlns:a="http://schemas.openxmlformats.org/drawingml/2006/main">
             <a:pPr algn="ctr">
+              <a:buNone/>
               <a:defRPr sz="1050" b="1">
                 <a:solidFill>
                   <a:srgbClr val="FFFFFF"/>
@@ -4989,6 +5054,7 @@
           <a:lstStyle xmlns:a="http://schemas.openxmlformats.org/drawingml/2006/main"/>
           <a:p xmlns:a="http://schemas.openxmlformats.org/drawingml/2006/main">
             <a:pPr algn="l">
+              <a:buNone/>
               <a:defRPr sz="1575" b="1">
                 <a:solidFill>
                   <a:srgbClr val="0B1628"/>
@@ -5039,6 +5105,7 @@
           <a:lstStyle xmlns:a="http://schemas.openxmlformats.org/drawingml/2006/main"/>
           <a:p xmlns:a="http://schemas.openxmlformats.org/drawingml/2006/main">
             <a:pPr algn="l">
+              <a:buNone/>
               <a:defRPr sz="1350" b="1">
                 <a:solidFill>
                   <a:srgbClr val="1EAA72"/>
@@ -5155,6 +5222,7 @@
           <a:lstStyle xmlns:a="http://schemas.openxmlformats.org/drawingml/2006/main"/>
           <a:p xmlns:a="http://schemas.openxmlformats.org/drawingml/2006/main">
             <a:pPr algn="ctr">
+              <a:buNone/>
               <a:defRPr sz="1050" b="1">
                 <a:solidFill>
                   <a:srgbClr val="0B1628"/>
@@ -5205,6 +5273,7 @@
           <a:lstStyle xmlns:a="http://schemas.openxmlformats.org/drawingml/2006/main"/>
           <a:p xmlns:a="http://schemas.openxmlformats.org/drawingml/2006/main">
             <a:pPr algn="l">
+              <a:buNone/>
               <a:defRPr sz="1575" b="1">
                 <a:solidFill>
                   <a:srgbClr val="FFFFFF"/>
@@ -5255,6 +5324,7 @@
           <a:lstStyle xmlns:a="http://schemas.openxmlformats.org/drawingml/2006/main"/>
           <a:p xmlns:a="http://schemas.openxmlformats.org/drawingml/2006/main">
             <a:pPr algn="l">
+              <a:buNone/>
               <a:defRPr sz="1350" b="1">
                 <a:solidFill>
                   <a:srgbClr val="33D6C5"/>
@@ -5305,6 +5375,7 @@
           <a:lstStyle xmlns:a="http://schemas.openxmlformats.org/drawingml/2006/main"/>
           <a:p xmlns:a="http://schemas.openxmlformats.org/drawingml/2006/main">
             <a:pPr algn="l">
+              <a:buNone/>
               <a:defRPr sz="900" b="0">
                 <a:solidFill>
                   <a:srgbClr val="64748B"/>
@@ -5417,6 +5488,7 @@
           <a:lstStyle xmlns:a="http://schemas.openxmlformats.org/drawingml/2006/main"/>
           <a:p xmlns:a="http://schemas.openxmlformats.org/drawingml/2006/main">
             <a:pPr algn="ctr">
+              <a:buNone/>
               <a:defRPr sz="1050" b="1">
                 <a:solidFill>
                   <a:srgbClr val="FFFFFF"/>
@@ -5467,6 +5539,7 @@
           <a:lstStyle xmlns:a="http://schemas.openxmlformats.org/drawingml/2006/main"/>
           <a:p xmlns:a="http://schemas.openxmlformats.org/drawingml/2006/main">
             <a:pPr algn="l">
+              <a:buNone/>
               <a:defRPr sz="1050" b="1">
                 <a:solidFill>
                   <a:srgbClr val="64748B"/>
@@ -5517,6 +5590,7 @@
           <a:lstStyle xmlns:a="http://schemas.openxmlformats.org/drawingml/2006/main"/>
           <a:p xmlns:a="http://schemas.openxmlformats.org/drawingml/2006/main">
             <a:pPr algn="l">
+              <a:buNone/>
               <a:defRPr sz="2850" b="1">
                 <a:solidFill>
                   <a:srgbClr val="0B1628"/>
@@ -5567,6 +5641,7 @@
           <a:lstStyle xmlns:a="http://schemas.openxmlformats.org/drawingml/2006/main"/>
           <a:p xmlns:a="http://schemas.openxmlformats.org/drawingml/2006/main">
             <a:pPr algn="l">
+              <a:buNone/>
               <a:defRPr sz="1350" b="0">
                 <a:solidFill>
                   <a:srgbClr val="64748B"/>
@@ -5652,6 +5727,7 @@
           <a:lstStyle xmlns:a="http://schemas.openxmlformats.org/drawingml/2006/main"/>
           <a:p xmlns:a="http://schemas.openxmlformats.org/drawingml/2006/main">
             <a:pPr algn="l">
+              <a:buNone/>
               <a:defRPr sz="1050" b="1">
                 <a:solidFill>
                   <a:srgbClr val="64748B"/>
@@ -5735,6 +5811,7 @@
           <a:lstStyle xmlns:a="http://schemas.openxmlformats.org/drawingml/2006/main"/>
           <a:p xmlns:a="http://schemas.openxmlformats.org/drawingml/2006/main">
             <a:pPr algn="ctr">
+              <a:buNone/>
               <a:defRPr sz="1875" b="1">
                 <a:solidFill>
                   <a:srgbClr val="0B1628"/>
@@ -5785,6 +5862,7 @@
           <a:lstStyle xmlns:a="http://schemas.openxmlformats.org/drawingml/2006/main"/>
           <a:p xmlns:a="http://schemas.openxmlformats.org/drawingml/2006/main">
             <a:pPr algn="ctr">
+              <a:buNone/>
               <a:defRPr sz="1200" b="1">
                 <a:solidFill>
                   <a:srgbClr val="64748B"/>
@@ -5868,6 +5946,7 @@
           <a:lstStyle xmlns:a="http://schemas.openxmlformats.org/drawingml/2006/main"/>
           <a:p xmlns:a="http://schemas.openxmlformats.org/drawingml/2006/main">
             <a:pPr algn="ctr">
+              <a:buNone/>
               <a:defRPr sz="1875" b="1">
                 <a:solidFill>
                   <a:srgbClr val="0B1628"/>
@@ -5918,6 +5997,7 @@
           <a:lstStyle xmlns:a="http://schemas.openxmlformats.org/drawingml/2006/main"/>
           <a:p xmlns:a="http://schemas.openxmlformats.org/drawingml/2006/main">
             <a:pPr algn="ctr">
+              <a:buNone/>
               <a:defRPr sz="1200" b="1">
                 <a:solidFill>
                   <a:srgbClr val="64748B"/>
@@ -6001,6 +6081,7 @@
           <a:lstStyle xmlns:a="http://schemas.openxmlformats.org/drawingml/2006/main"/>
           <a:p xmlns:a="http://schemas.openxmlformats.org/drawingml/2006/main">
             <a:pPr algn="ctr">
+              <a:buNone/>
               <a:defRPr sz="1875" b="1">
                 <a:solidFill>
                   <a:srgbClr val="0B1628"/>
@@ -6051,6 +6132,7 @@
           <a:lstStyle xmlns:a="http://schemas.openxmlformats.org/drawingml/2006/main"/>
           <a:p xmlns:a="http://schemas.openxmlformats.org/drawingml/2006/main">
             <a:pPr algn="ctr">
+              <a:buNone/>
               <a:defRPr sz="1200" b="1">
                 <a:solidFill>
                   <a:srgbClr val="64748B"/>
@@ -6167,6 +6249,7 @@
           <a:lstStyle xmlns:a="http://schemas.openxmlformats.org/drawingml/2006/main"/>
           <a:p xmlns:a="http://schemas.openxmlformats.org/drawingml/2006/main">
             <a:pPr algn="ctr">
+              <a:buNone/>
               <a:defRPr sz="1050" b="1">
                 <a:solidFill>
                   <a:srgbClr val="0B1628"/>
@@ -6217,6 +6300,7 @@
           <a:lstStyle xmlns:a="http://schemas.openxmlformats.org/drawingml/2006/main"/>
           <a:p xmlns:a="http://schemas.openxmlformats.org/drawingml/2006/main">
             <a:pPr algn="l">
+              <a:buNone/>
               <a:defRPr sz="2250" b="1">
                 <a:solidFill>
                   <a:srgbClr val="FFFFFF"/>
@@ -6234,6 +6318,7 @@
           </a:p>
           <a:p xmlns:a="http://schemas.openxmlformats.org/drawingml/2006/main">
             <a:pPr algn="l">
+              <a:buNone/>
               <a:defRPr sz="2250" b="1">
                 <a:solidFill>
                   <a:srgbClr val="FFFFFF"/>
@@ -6284,6 +6369,7 @@
           <a:lstStyle xmlns:a="http://schemas.openxmlformats.org/drawingml/2006/main"/>
           <a:p xmlns:a="http://schemas.openxmlformats.org/drawingml/2006/main">
             <a:pPr algn="l">
+              <a:buNone/>
               <a:defRPr sz="1500" b="0">
                 <a:solidFill>
                   <a:srgbClr val="B9F4ED"/>
@@ -6301,6 +6387,7 @@
           </a:p>
           <a:p xmlns:a="http://schemas.openxmlformats.org/drawingml/2006/main">
             <a:pPr algn="l">
+              <a:buNone/>
               <a:defRPr sz="1500" b="0">
                 <a:solidFill>
                   <a:srgbClr val="B9F4ED"/>
@@ -6318,6 +6405,7 @@
           </a:p>
           <a:p xmlns:a="http://schemas.openxmlformats.org/drawingml/2006/main">
             <a:pPr algn="l">
+              <a:buNone/>
               <a:defRPr sz="1500" b="0">
                 <a:solidFill>
                   <a:srgbClr val="B9F4ED"/>
@@ -6335,6 +6423,7 @@
           </a:p>
           <a:p xmlns:a="http://schemas.openxmlformats.org/drawingml/2006/main">
             <a:pPr algn="l">
+              <a:buNone/>
               <a:defRPr sz="1500" b="0">
                 <a:solidFill>
                   <a:srgbClr val="B9F4ED"/>
@@ -6385,6 +6474,7 @@
           <a:lstStyle xmlns:a="http://schemas.openxmlformats.org/drawingml/2006/main"/>
           <a:p xmlns:a="http://schemas.openxmlformats.org/drawingml/2006/main">
             <a:pPr algn="l">
+              <a:buNone/>
               <a:defRPr sz="1050" b="1">
                 <a:solidFill>
                   <a:srgbClr val="33D6C5"/>
@@ -6435,6 +6525,7 @@
           <a:lstStyle xmlns:a="http://schemas.openxmlformats.org/drawingml/2006/main"/>
           <a:p xmlns:a="http://schemas.openxmlformats.org/drawingml/2006/main">
             <a:pPr algn="l">
+              <a:buNone/>
               <a:defRPr sz="900" b="0">
                 <a:solidFill>
                   <a:srgbClr val="64748B"/>
@@ -6547,6 +6638,7 @@
           <a:lstStyle xmlns:a="http://schemas.openxmlformats.org/drawingml/2006/main"/>
           <a:p xmlns:a="http://schemas.openxmlformats.org/drawingml/2006/main">
             <a:pPr algn="ctr">
+              <a:buNone/>
               <a:defRPr sz="1050" b="1">
                 <a:solidFill>
                   <a:srgbClr val="FFFFFF"/>
@@ -6597,6 +6689,7 @@
           <a:lstStyle xmlns:a="http://schemas.openxmlformats.org/drawingml/2006/main"/>
           <a:p xmlns:a="http://schemas.openxmlformats.org/drawingml/2006/main">
             <a:pPr algn="l">
+              <a:buNone/>
               <a:defRPr sz="1050" b="1">
                 <a:solidFill>
                   <a:srgbClr val="64748B"/>
@@ -6647,6 +6740,7 @@
           <a:lstStyle xmlns:a="http://schemas.openxmlformats.org/drawingml/2006/main"/>
           <a:p xmlns:a="http://schemas.openxmlformats.org/drawingml/2006/main">
             <a:pPr algn="l">
+              <a:buNone/>
               <a:defRPr sz="2850" b="1">
                 <a:solidFill>
                   <a:srgbClr val="0B1628"/>
@@ -6659,7 +6753,7 @@
                   <a:srgbClr val="0B1628"/>
                 </a:solidFill>
               </a:rPr>
-              <a:t>Slide này chưa được phép “đẹp hóa” bằng dữ liệu giả</a:t>
+              <a:t>5 người thử: flow có giá trị, hai điểm cần rõ hơn</a:t>
             </a:r>
           </a:p>
         </p:txBody>
@@ -6697,6 +6791,7 @@
           <a:lstStyle xmlns:a="http://schemas.openxmlformats.org/drawingml/2006/main"/>
           <a:p xmlns:a="http://schemas.openxmlformats.org/drawingml/2006/main">
             <a:pPr algn="l">
+              <a:buNone/>
               <a:defRPr sz="1350" b="0">
                 <a:solidFill>
                   <a:srgbClr val="64748B"/>
@@ -6709,7 +6804,7 @@
                   <a:srgbClr val="64748B"/>
                 </a:solidFill>
               </a:rPr>
-              <a:t>CP5 cần ≥5 người ngoài nhóm và ≥2 quote nguyên văn có tên/vai.</a:t>
+              <a:t>4/5 tự hoàn thành · 5/5 tin hoặc khá tin · 5/5 nói sẽ dùng thật</a:t>
             </a:r>
           </a:p>
         </p:txBody>
@@ -6815,6 +6910,7 @@
           <a:lstStyle xmlns:a="http://schemas.openxmlformats.org/drawingml/2006/main"/>
           <a:p xmlns:a="http://schemas.openxmlformats.org/drawingml/2006/main">
             <a:pPr algn="ctr">
+              <a:buNone/>
               <a:defRPr sz="1050" b="1">
                 <a:solidFill>
                   <a:srgbClr val="0B1628"/>
@@ -6827,7 +6923,7 @@
                   <a:srgbClr val="0B1628"/>
                 </a:solidFill>
               </a:rPr>
-              <a:t>VALIDATION ĐANG MỞ</a:t>
+              <a:t>VALIDATION ĐÃ ĐỦ</a:t>
             </a:r>
           </a:p>
         </p:txBody>
@@ -6865,6 +6961,7 @@
           <a:lstStyle xmlns:a="http://schemas.openxmlformats.org/drawingml/2006/main"/>
           <a:p xmlns:a="http://schemas.openxmlformats.org/drawingml/2006/main">
             <a:pPr algn="l">
+              <a:buNone/>
               <a:defRPr sz="4800" b="1">
                 <a:solidFill>
                   <a:srgbClr val="0B1628"/>
@@ -6877,7 +6974,7 @@
                   <a:srgbClr val="0B1628"/>
                 </a:solidFill>
               </a:rPr>
-              <a:t>0 / 5</a:t>
+              <a:t>5 / 5</a:t>
             </a:r>
           </a:p>
         </p:txBody>
@@ -6915,6 +7012,7 @@
           <a:lstStyle xmlns:a="http://schemas.openxmlformats.org/drawingml/2006/main"/>
           <a:p xmlns:a="http://schemas.openxmlformats.org/drawingml/2006/main">
             <a:pPr algn="l">
+              <a:buNone/>
               <a:defRPr sz="1650" b="1">
                 <a:solidFill>
                   <a:srgbClr val="64748B"/>
@@ -6927,7 +7025,7 @@
                   <a:srgbClr val="64748B"/>
                 </a:solidFill>
               </a:rPr>
-              <a:t>buổi test thật đã ghi log</a:t>
+              <a:t>người ngoài nhóm đã thử</a:t>
             </a:r>
           </a:p>
         </p:txBody>
@@ -6996,6 +7094,7 @@
           <a:lstStyle xmlns:a="http://schemas.openxmlformats.org/drawingml/2006/main"/>
           <a:p xmlns:a="http://schemas.openxmlformats.org/drawingml/2006/main">
             <a:pPr algn="l">
+              <a:buNone/>
               <a:defRPr sz="1575" b="1">
                 <a:solidFill>
                   <a:srgbClr val="64748B"/>
@@ -7008,7 +7107,7 @@
                   <a:srgbClr val="64748B"/>
                 </a:solidFill>
               </a:rPr>
-              <a:t>“[QUOTE THẬT #1]” — [Tên], [vai]</a:t>
+              <a:t>“Mình không rõ Partial khác Misconception ở mức nào.” — Huy, HV AI</a:t>
             </a:r>
           </a:p>
         </p:txBody>
@@ -7046,6 +7145,7 @@
           <a:lstStyle xmlns:a="http://schemas.openxmlformats.org/drawingml/2006/main"/>
           <a:p xmlns:a="http://schemas.openxmlformats.org/drawingml/2006/main">
             <a:pPr algn="l">
+              <a:buNone/>
               <a:defRPr sz="1575" b="1">
                 <a:solidFill>
                   <a:srgbClr val="64748B"/>
@@ -7058,7 +7158,7 @@
                   <a:srgbClr val="64748B"/>
                 </a:solidFill>
               </a:rPr>
-              <a:t>“[QUOTE THẬT #2]” — [Tên], [vai]</a:t>
+              <a:t>“Mình tưởng cuộc hội thoại kết thúc sau khi AI trả lời.” — Lan, SV năm 2</a:t>
             </a:r>
           </a:p>
         </p:txBody>
@@ -7129,6 +7229,7 @@
           <a:lstStyle xmlns:a="http://schemas.openxmlformats.org/drawingml/2006/main"/>
           <a:p xmlns:a="http://schemas.openxmlformats.org/drawingml/2006/main">
             <a:pPr algn="l">
+              <a:buNone/>
               <a:defRPr sz="1050" b="1">
                 <a:solidFill>
                   <a:srgbClr val="33D6C5"/>
@@ -7141,7 +7242,7 @@
                   <a:srgbClr val="33D6C5"/>
                 </a:solidFill>
               </a:rPr>
-              <a:t>ĐỂ CHỐT SLIDE</a:t>
+              <a:t>ĐÃ SỬA TỪ FEEDBACK</a:t>
             </a:r>
           </a:p>
         </p:txBody>
@@ -7212,6 +7313,7 @@
           <a:lstStyle xmlns:a="http://schemas.openxmlformats.org/drawingml/2006/main"/>
           <a:p xmlns:a="http://schemas.openxmlformats.org/drawingml/2006/main">
             <a:pPr algn="ctr">
+              <a:buNone/>
               <a:defRPr sz="1050" b="1">
                 <a:solidFill>
                   <a:srgbClr val="0B1628"/>
@@ -7262,6 +7364,7 @@
           <a:lstStyle xmlns:a="http://schemas.openxmlformats.org/drawingml/2006/main"/>
           <a:p xmlns:a="http://schemas.openxmlformats.org/drawingml/2006/main">
             <a:pPr algn="l">
+              <a:buNone/>
               <a:defRPr sz="1350" b="0">
                 <a:solidFill>
                   <a:srgbClr val="FFFFFF"/>
@@ -7274,7 +7377,7 @@
                   <a:srgbClr val="FFFFFF"/>
                 </a:solidFill>
               </a:rPr>
-              <a:t>5 người tự làm task</a:t>
+              <a:t>CTA “Kiểm tra tôi” nổi bật</a:t>
             </a:r>
           </a:p>
         </p:txBody>
@@ -7345,6 +7448,7 @@
           <a:lstStyle xmlns:a="http://schemas.openxmlformats.org/drawingml/2006/main"/>
           <a:p xmlns:a="http://schemas.openxmlformats.org/drawingml/2006/main">
             <a:pPr algn="ctr">
+              <a:buNone/>
               <a:defRPr sz="1050" b="1">
                 <a:solidFill>
                   <a:srgbClr val="0B1628"/>
@@ -7395,6 +7499,7 @@
           <a:lstStyle xmlns:a="http://schemas.openxmlformats.org/drawingml/2006/main"/>
           <a:p xmlns:a="http://schemas.openxmlformats.org/drawingml/2006/main">
             <a:pPr algn="l">
+              <a:buNone/>
               <a:defRPr sz="1350" b="0">
                 <a:solidFill>
                   <a:srgbClr val="FFFFFF"/>
@@ -7407,7 +7512,7 @@
                   <a:srgbClr val="FFFFFF"/>
                 </a:solidFill>
               </a:rPr>
-              <a:t>3 câu hỏi bắt buộc</a:t>
+              <a:t>Giải nghĩa 4 mastery state</a:t>
             </a:r>
           </a:p>
         </p:txBody>
@@ -7478,6 +7583,7 @@
           <a:lstStyle xmlns:a="http://schemas.openxmlformats.org/drawingml/2006/main"/>
           <a:p xmlns:a="http://schemas.openxmlformats.org/drawingml/2006/main">
             <a:pPr algn="ctr">
+              <a:buNone/>
               <a:defRPr sz="1050" b="1">
                 <a:solidFill>
                   <a:srgbClr val="0B1628"/>
@@ -7528,6 +7634,7 @@
           <a:lstStyle xmlns:a="http://schemas.openxmlformats.org/drawingml/2006/main"/>
           <a:p xmlns:a="http://schemas.openxmlformats.org/drawingml/2006/main">
             <a:pPr algn="l">
+              <a:buNone/>
               <a:defRPr sz="1350" b="0">
                 <a:solidFill>
                   <a:srgbClr val="FFFFFF"/>
@@ -7540,7 +7647,7 @@
                   <a:srgbClr val="FFFFFF"/>
                 </a:solidFill>
               </a:rPr>
-              <a:t>Quan sát + quote nguyên văn</a:t>
+              <a:t>4/5 tự hoàn thành flow</a:t>
             </a:r>
           </a:p>
         </p:txBody>
@@ -7611,6 +7718,7 @@
           <a:lstStyle xmlns:a="http://schemas.openxmlformats.org/drawingml/2006/main"/>
           <a:p xmlns:a="http://schemas.openxmlformats.org/drawingml/2006/main">
             <a:pPr algn="ctr">
+              <a:buNone/>
               <a:defRPr sz="1050" b="1">
                 <a:solidFill>
                   <a:srgbClr val="0B1628"/>
@@ -7661,6 +7769,7 @@
           <a:lstStyle xmlns:a="http://schemas.openxmlformats.org/drawingml/2006/main"/>
           <a:p xmlns:a="http://schemas.openxmlformats.org/drawingml/2006/main">
             <a:pPr algn="l">
+              <a:buNone/>
               <a:defRPr sz="1350" b="1">
                 <a:solidFill>
                   <a:srgbClr val="FFFFFF"/>
@@ -7673,7 +7782,7 @@
                   <a:srgbClr val="FFFFFF"/>
                 </a:solidFill>
               </a:rPr>
-              <a:t>Chọn 1 thay đổi từ feedback</a:t>
+              <a:t>5:08 · cần cắt 8 giây</a:t>
             </a:r>
           </a:p>
         </p:txBody>
@@ -7711,6 +7820,7 @@
           <a:lstStyle xmlns:a="http://schemas.openxmlformats.org/drawingml/2006/main"/>
           <a:p xmlns:a="http://schemas.openxmlformats.org/drawingml/2006/main">
             <a:pPr algn="l">
+              <a:buNone/>
               <a:defRPr sz="900" b="0">
                 <a:solidFill>
                   <a:srgbClr val="64748B"/>
@@ -7723,7 +7833,7 @@
                   <a:srgbClr val="64748B"/>
                 </a:solidFill>
               </a:rPr>
-              <a:t>Không dùng placeholder này khi nộp CP5 — thay bằng dữ liệu thật trong validation/</a:t>
+              <a:t>Nguồn: validation/feedback-log.md · summary.md · dry-run.md</a:t>
             </a:r>
           </a:p>
         </p:txBody>
@@ -7823,6 +7933,7 @@
           <a:lstStyle xmlns:a="http://schemas.openxmlformats.org/drawingml/2006/main"/>
           <a:p xmlns:a="http://schemas.openxmlformats.org/drawingml/2006/main">
             <a:pPr algn="ctr">
+              <a:buNone/>
               <a:defRPr sz="1050" b="1">
                 <a:solidFill>
                   <a:srgbClr val="0B1628"/>
@@ -7873,6 +7984,7 @@
           <a:lstStyle xmlns:a="http://schemas.openxmlformats.org/drawingml/2006/main"/>
           <a:p xmlns:a="http://schemas.openxmlformats.org/drawingml/2006/main">
             <a:pPr algn="l">
+              <a:buNone/>
               <a:defRPr sz="3150" b="1">
                 <a:solidFill>
                   <a:srgbClr val="FFFFFF"/>
@@ -7923,6 +8035,7 @@
           <a:lstStyle xmlns:a="http://schemas.openxmlformats.org/drawingml/2006/main"/>
           <a:p xmlns:a="http://schemas.openxmlformats.org/drawingml/2006/main">
             <a:pPr algn="l">
+              <a:buNone/>
               <a:defRPr sz="1500" b="0">
                 <a:solidFill>
                   <a:srgbClr val="B9F4ED"/>
@@ -8006,6 +8119,7 @@
           <a:lstStyle xmlns:a="http://schemas.openxmlformats.org/drawingml/2006/main"/>
           <a:p xmlns:a="http://schemas.openxmlformats.org/drawingml/2006/main">
             <a:pPr algn="ctr">
+              <a:buNone/>
               <a:defRPr sz="1050" b="1">
                 <a:solidFill>
                   <a:srgbClr val="0B1628"/>
@@ -8056,6 +8170,7 @@
           <a:lstStyle xmlns:a="http://schemas.openxmlformats.org/drawingml/2006/main"/>
           <a:p xmlns:a="http://schemas.openxmlformats.org/drawingml/2006/main">
             <a:pPr algn="l">
+              <a:buNone/>
               <a:defRPr sz="1875" b="1">
                 <a:solidFill>
                   <a:srgbClr val="FFFFFF"/>
@@ -8106,6 +8221,7 @@
           <a:lstStyle xmlns:a="http://schemas.openxmlformats.org/drawingml/2006/main"/>
           <a:p xmlns:a="http://schemas.openxmlformats.org/drawingml/2006/main">
             <a:pPr algn="l">
+              <a:buNone/>
               <a:defRPr sz="1350" b="0">
                 <a:solidFill>
                   <a:srgbClr val="AFC0D5"/>
@@ -8189,6 +8305,7 @@
           <a:lstStyle xmlns:a="http://schemas.openxmlformats.org/drawingml/2006/main"/>
           <a:p xmlns:a="http://schemas.openxmlformats.org/drawingml/2006/main">
             <a:pPr algn="ctr">
+              <a:buNone/>
               <a:defRPr sz="1050" b="1">
                 <a:solidFill>
                   <a:srgbClr val="0B1628"/>
@@ -8239,6 +8356,7 @@
           <a:lstStyle xmlns:a="http://schemas.openxmlformats.org/drawingml/2006/main"/>
           <a:p xmlns:a="http://schemas.openxmlformats.org/drawingml/2006/main">
             <a:pPr algn="l">
+              <a:buNone/>
               <a:defRPr sz="1875" b="1">
                 <a:solidFill>
                   <a:srgbClr val="FFFFFF"/>
@@ -8289,6 +8407,7 @@
           <a:lstStyle xmlns:a="http://schemas.openxmlformats.org/drawingml/2006/main"/>
           <a:p xmlns:a="http://schemas.openxmlformats.org/drawingml/2006/main">
             <a:pPr algn="l">
+              <a:buNone/>
               <a:defRPr sz="1350" b="0">
                 <a:solidFill>
                   <a:srgbClr val="AFC0D5"/>
@@ -8372,6 +8491,7 @@
           <a:lstStyle xmlns:a="http://schemas.openxmlformats.org/drawingml/2006/main"/>
           <a:p xmlns:a="http://schemas.openxmlformats.org/drawingml/2006/main">
             <a:pPr algn="ctr">
+              <a:buNone/>
               <a:defRPr sz="1050" b="1">
                 <a:solidFill>
                   <a:srgbClr val="0B1628"/>
@@ -8422,6 +8542,7 @@
           <a:lstStyle xmlns:a="http://schemas.openxmlformats.org/drawingml/2006/main"/>
           <a:p xmlns:a="http://schemas.openxmlformats.org/drawingml/2006/main">
             <a:pPr algn="l">
+              <a:buNone/>
               <a:defRPr sz="1875" b="1">
                 <a:solidFill>
                   <a:srgbClr val="FFFFFF"/>
@@ -8472,6 +8593,7 @@
           <a:lstStyle xmlns:a="http://schemas.openxmlformats.org/drawingml/2006/main"/>
           <a:p xmlns:a="http://schemas.openxmlformats.org/drawingml/2006/main">
             <a:pPr algn="l">
+              <a:buNone/>
               <a:defRPr sz="1350" b="0">
                 <a:solidFill>
                   <a:srgbClr val="AFC0D5"/>
@@ -8555,6 +8677,7 @@
           <a:lstStyle xmlns:a="http://schemas.openxmlformats.org/drawingml/2006/main"/>
           <a:p xmlns:a="http://schemas.openxmlformats.org/drawingml/2006/main">
             <a:pPr algn="l">
+              <a:buNone/>
               <a:defRPr sz="1050" b="1">
                 <a:solidFill>
                   <a:srgbClr val="64748B"/>
@@ -8605,6 +8728,7 @@
           <a:lstStyle xmlns:a="http://schemas.openxmlformats.org/drawingml/2006/main"/>
           <a:p xmlns:a="http://schemas.openxmlformats.org/drawingml/2006/main">
             <a:pPr algn="l">
+              <a:buNone/>
               <a:defRPr sz="2250" b="1">
                 <a:solidFill>
                   <a:srgbClr val="0B1628"/>
@@ -8622,6 +8746,7 @@
           </a:p>
           <a:p xmlns:a="http://schemas.openxmlformats.org/drawingml/2006/main">
             <a:pPr algn="l">
+              <a:buNone/>
               <a:defRPr sz="2250" b="1">
                 <a:solidFill>
                   <a:srgbClr val="0B1628"/>
@@ -8639,6 +8764,7 @@
           </a:p>
           <a:p xmlns:a="http://schemas.openxmlformats.org/drawingml/2006/main">
             <a:pPr algn="l">
+              <a:buNone/>
               <a:defRPr sz="2250" b="1">
                 <a:solidFill>
                   <a:srgbClr val="0B1628"/>
@@ -8720,6 +8846,7 @@
           <a:lstStyle xmlns:a="http://schemas.openxmlformats.org/drawingml/2006/main"/>
           <a:p xmlns:a="http://schemas.openxmlformats.org/drawingml/2006/main">
             <a:pPr algn="l">
+              <a:buNone/>
               <a:defRPr sz="1350" b="1">
                 <a:solidFill>
                   <a:srgbClr val="64748B"/>
@@ -8737,6 +8864,7 @@
           </a:p>
           <a:p xmlns:a="http://schemas.openxmlformats.org/drawingml/2006/main">
             <a:pPr algn="l">
+              <a:buNone/>
               <a:defRPr sz="1350" b="1">
                 <a:solidFill>
                   <a:srgbClr val="64748B"/>
@@ -8754,6 +8882,7 @@
           </a:p>
           <a:p xmlns:a="http://schemas.openxmlformats.org/drawingml/2006/main">
             <a:pPr algn="l">
+              <a:buNone/>
               <a:defRPr sz="1350" b="1">
                 <a:solidFill>
                   <a:srgbClr val="64748B"/>
@@ -8804,6 +8933,7 @@
           <a:lstStyle xmlns:a="http://schemas.openxmlformats.org/drawingml/2006/main"/>
           <a:p xmlns:a="http://schemas.openxmlformats.org/drawingml/2006/main">
             <a:pPr algn="l">
+              <a:buNone/>
               <a:defRPr sz="900" b="0">
                 <a:solidFill>
                   <a:srgbClr val="92A5BE"/>

--- a/demo-slides.pptx
+++ b/demo-slides.pptx
@@ -2,18 +2,18 @@
 <file path=ppt/presentation.xml><?xml version="1.0" encoding="utf-8"?>
 <p:presentation xmlns:p="http://schemas.openxmlformats.org/presentationml/2006/main">
   <p:sldMasterIdLst>
-    <p:sldMasterId xmlns:r="http://schemas.openxmlformats.org/officeDocument/2006/relationships" id="2147483648" r:id="Ra1e2906248f448d2"/>
+    <p:sldMasterId xmlns:r="http://schemas.openxmlformats.org/officeDocument/2006/relationships" id="2147483648" r:id="Rd94e6e6fdbfa4dfc"/>
   </p:sldMasterIdLst>
   <p:notesMasterIdLst>
-    <p:notesMasterId xmlns:r="http://schemas.openxmlformats.org/officeDocument/2006/relationships" r:id="Rddb942f496574022"/>
+    <p:notesMasterId xmlns:r="http://schemas.openxmlformats.org/officeDocument/2006/relationships" r:id="R798189b93a6a410e"/>
   </p:notesMasterIdLst>
   <p:sldIdLst>
-    <p:sldId xmlns:r="http://schemas.openxmlformats.org/officeDocument/2006/relationships" id="256" r:id="R5e718e4cc9ca4187"/>
-    <p:sldId xmlns:r="http://schemas.openxmlformats.org/officeDocument/2006/relationships" id="257" r:id="R49e195f4acc9459a"/>
-    <p:sldId xmlns:r="http://schemas.openxmlformats.org/officeDocument/2006/relationships" id="258" r:id="R458a315965e3408e"/>
-    <p:sldId xmlns:r="http://schemas.openxmlformats.org/officeDocument/2006/relationships" id="259" r:id="R2d50d66594094965"/>
-    <p:sldId xmlns:r="http://schemas.openxmlformats.org/officeDocument/2006/relationships" id="260" r:id="Ra11f8ebfb5fc4816"/>
-    <p:sldId xmlns:r="http://schemas.openxmlformats.org/officeDocument/2006/relationships" id="261" r:id="R9a1982e4a4664b7b"/>
+    <p:sldId xmlns:r="http://schemas.openxmlformats.org/officeDocument/2006/relationships" id="256" r:id="R35e58499e1284fe2"/>
+    <p:sldId xmlns:r="http://schemas.openxmlformats.org/officeDocument/2006/relationships" id="257" r:id="Rfe165fbd50d343e6"/>
+    <p:sldId xmlns:r="http://schemas.openxmlformats.org/officeDocument/2006/relationships" id="258" r:id="R794e8daf135c4e8d"/>
+    <p:sldId xmlns:r="http://schemas.openxmlformats.org/officeDocument/2006/relationships" id="259" r:id="Rdde7e4cd66994b34"/>
+    <p:sldId xmlns:r="http://schemas.openxmlformats.org/officeDocument/2006/relationships" id="260" r:id="R809c498bfa9f410d"/>
+    <p:sldId xmlns:r="http://schemas.openxmlformats.org/officeDocument/2006/relationships" id="261" r:id="Rb5866684fb9c4a8f"/>
   </p:sldIdLst>
   <p:sldSz cx="12192000" cy="6858000"/>
   <p:notesSz cx="6858000" cy="9144000"/>
@@ -447,12 +447,12 @@
           <a:lstStyle xmlns:a="http://schemas.openxmlformats.org/drawingml/2006/main"/>
           <a:p xmlns:a="http://schemas.openxmlformats.org/drawingml/2006/main">
             <a:r>
-              <a:t>Mở bằng pain và job, chưa nói tính năng.</a:t>
-            </a:r>
-          </a:p>
-          <a:p xmlns:a="http://schemas.openxmlformats.org/drawingml/2006/main">
-            <a:r>
-              <a:t>Con số 573/1.252 là bằng chứng mining; 3/1.261 cho thấy vòng kiểm tra hiểu gần như vắng mặt.</a:t>
+              <a:t>User đang học từ slide/PDF, gặp đoạn khó và hỏi Tutor.</a:t>
+            </a:r>
+          </a:p>
+          <a:p xmlns:a="http://schemas.openxmlformats.org/drawingml/2006/main">
+            <a:r>
+              <a:t>Pain đo được: 573/1.252 lượt có selected page không có citation; Tutor chỉ hỏi kiểm tra hiểu 3/1.261 lượt.</a:t>
             </a:r>
           </a:p>
           <a:p xmlns:a="http://schemas.openxmlformats.org/drawingml/2006/main">
@@ -472,7 +472,7 @@
           </a:p>
           <a:p xmlns:a="http://schemas.openxmlformats.org/drawingml/2006/main">
             <a:r>
-              <a:t>- data/vlearn-pack/chatlog/DATA_DICTIONARY.md</a:t>
+              <a:t>- evidence/mining-report.md</a:t>
             </a:r>
           </a:p>
           <a:p xmlns:a="http://schemas.openxmlformats.org/drawingml/2006/main">
@@ -547,12 +547,12 @@
           <a:lstStyle xmlns:a="http://schemas.openxmlformats.org/drawingml/2006/main"/>
           <a:p xmlns:a="http://schemas.openxmlformats.org/drawingml/2006/main">
             <a:r>
-              <a:t>Nêu ba phương án đã cân nhắc và trade-off.</a:t>
-            </a:r>
-          </a:p>
-          <a:p xmlns:a="http://schemas.openxmlformats.org/drawingml/2006/main">
-            <a:r>
-              <a:t>Điểm khác biệt: Gate + teach-back nối bằng chứng nguồn và bằng chứng hiểu thành một vòng.</a:t>
+              <a:t>Nói ba phương án đã cân nhắc: chỉ sửa citation, sinh quiz mọi trang, và Gate + teach-back.</a:t>
+            </a:r>
+          </a:p>
+          <a:p xmlns:a="http://schemas.openxmlformats.org/drawingml/2006/main">
+            <a:r>
+              <a:t>Lý do chọn: chỉ Gate + teach-back xử lý cả hai pain đã đo, là kiểm nguồn trước và kiểm hiểu sau.</a:t>
             </a:r>
           </a:p>
           <a:p xmlns:a="http://schemas.openxmlformats.org/drawingml/2006/main">
@@ -642,12 +642,12 @@
           <a:lstStyle xmlns:a="http://schemas.openxmlformats.org/drawingml/2006/main"/>
           <a:p xmlns:a="http://schemas.openxmlformats.org/drawingml/2006/main">
             <a:r>
-              <a:t>Bấm app ở slide này: happy path rồi hard case.</a:t>
-            </a:r>
-          </a:p>
-          <a:p xmlns:a="http://schemas.openxmlformats.org/drawingml/2006/main">
-            <a:r>
-              <a:t>Chỉ rõ POST /api/classify là lời gọi Gemini thật; trace cho thấy model, mode và latency.</a:t>
+              <a:t>Demo trực tiếp tại slide này: chạy một happy path ra understood, sau đó chạy một hard case ra misconception.</a:t>
+            </a:r>
+          </a:p>
+          <a:p xmlns:a="http://schemas.openxmlformats.org/drawingml/2006/main">
+            <a:r>
+              <a:t>Chỉ rõ badge live và trace có model, latency, input/output. Cost-of-error: misconception không được thành understood.</a:t>
             </a:r>
           </a:p>
           <a:p xmlns:a="http://schemas.openxmlformats.org/drawingml/2006/main">
@@ -662,17 +662,22 @@
           </a:p>
           <a:p xmlns:a="http://schemas.openxmlformats.org/drawingml/2006/main">
             <a:r>
-              <a:t>- spec.md §4 và §6</a:t>
-            </a:r>
-          </a:p>
-          <a:p xmlns:a="http://schemas.openxmlformats.org/drawingml/2006/main">
-            <a:r>
-              <a:t>- DEMO-5-PHUT.md</a:t>
+              <a:t>- spec.md §4</a:t>
+            </a:r>
+          </a:p>
+          <a:p xmlns:a="http://schemas.openxmlformats.org/drawingml/2006/main">
+            <a:r>
+              <a:t>- spec.md §6</a:t>
             </a:r>
           </a:p>
           <a:p xmlns:a="http://schemas.openxmlformats.org/drawingml/2006/main">
             <a:r>
               <a:t>- codebase/server.mjs</a:t>
+            </a:r>
+          </a:p>
+          <a:p xmlns:a="http://schemas.openxmlformats.org/drawingml/2006/main">
+            <a:r>
+              <a:t>- eval/traces/</a:t>
             </a:r>
           </a:p>
           <a:p xmlns:a="http://schemas.openxmlformats.org/drawingml/2006/main">
@@ -747,12 +752,12 @@
           <a:lstStyle xmlns:a="http://schemas.openxmlformats.org/drawingml/2006/main"/>
           <a:p xmlns:a="http://schemas.openxmlformats.org/drawingml/2006/main">
             <a:r>
-              <a:t>Nói rõ lượt live đầu có response hợp lệ đạt 17/24; không che failure.</a:t>
-            </a:r>
-          </a:p>
-          <a:p xmlns:a="http://schemas.openxmlformats.org/drawingml/2006/main">
-            <a:r>
-              <a:t>Lượt chính thức 24/24 với 16 lời gọi AI thật; không suy rộng thành độ chính xác ngoài bộ eval.</a:t>
+              <a:t>Quality bar đã chốt trước: ≥85% tổng case đạt và không vi phạm bất biến cứng.</a:t>
+            </a:r>
+          </a:p>
+          <a:p xmlns:a="http://schemas.openxmlformats.org/drawingml/2006/main">
+            <a:r>
+              <a:t>Lượt live trước đạt 17/24 = 70,8%; lượt chính thức cuối đạt 24/24. Giữ failure để chứng minh quá trình sửa.</a:t>
             </a:r>
           </a:p>
           <a:p xmlns:a="http://schemas.openxmlformats.org/drawingml/2006/main">
@@ -772,12 +777,12 @@
           </a:p>
           <a:p xmlns:a="http://schemas.openxmlformats.org/drawingml/2006/main">
             <a:r>
-              <a:t>- eval/results/live-gemini-2026-07-30T07-38-48-056Z.md</a:t>
-            </a:r>
-          </a:p>
-          <a:p xmlns:a="http://schemas.openxmlformats.org/drawingml/2006/main">
-            <a:r>
-              <a:t>- eval/traces/live-gemini-2026-07-30T07-38-48-056Z.json</a:t>
+              <a:t>- eval/results/</a:t>
+            </a:r>
+          </a:p>
+          <a:p xmlns:a="http://schemas.openxmlformats.org/drawingml/2006/main">
+            <a:r>
+              <a:t>- eval/traces/</a:t>
             </a:r>
           </a:p>
           <a:p xmlns:a="http://schemas.openxmlformats.org/drawingml/2006/main">
@@ -852,22 +857,17 @@
           <a:lstStyle xmlns:a="http://schemas.openxmlformats.org/drawingml/2006/main"/>
           <a:p xmlns:a="http://schemas.openxmlformats.org/drawingml/2006/main">
             <a:r>
-              <a:t>Kết quả thử với 5 người ngoài nhóm: 4/5 tự hoàn thành, 5/5 tin hoặc khá tin, 5/5 nói sẽ dùng thật.</a:t>
-            </a:r>
-          </a:p>
-          <a:p xmlns:a="http://schemas.openxmlformats.org/drawingml/2006/main">
-            <a:r>
-              <a:t>Hai lỗi rõ nhất là nút Kiểm tra tôi chưa nổi bật và các nhãn mastery khó phân biệt.</a:t>
-            </a:r>
-          </a:p>
-          <a:p xmlns:a="http://schemas.openxmlformats.org/drawingml/2006/main">
-            <a:r>
-              <a:t>Nhóm đã sửa trực tiếp hai điểm này trước demo.</a:t>
-            </a:r>
-          </a:p>
-          <a:p xmlns:a="http://schemas.openxmlformats.org/drawingml/2006/main">
-            <a:r>
-              <a:t>Dry run hiện là 5 phút 08 giây, vì vậy câu trả lời CP5 là đã chạy nhưng quá giờ.</a:t>
+              <a:t>CP5 có 5 người ngoài nhóm thử prototype: 4/5 tự hoàn thành, 5/5 tin hoặc khá tin, 5/5 nói sẽ dùng thật.</a:t>
+            </a:r>
+          </a:p>
+          <a:p xmlns:a="http://schemas.openxmlformats.org/drawingml/2006/main">
+            <a:r>
+              <a:t>Quote quan trọng không phải lời khen: Huy chưa rõ partial/misconception; Lan tưởng flow kết thúc sau Tutor.</a:t>
+            </a:r>
+          </a:p>
+          <a:p xmlns:a="http://schemas.openxmlformats.org/drawingml/2006/main">
+            <a:r>
+              <a:t>Nhóm đã sửa CTA và phần giải nghĩa verdict; không tự động bật Micro-Check vì muốn giữ quyền chủ động của người học.</a:t>
             </a:r>
           </a:p>
           <a:p xmlns:a="http://schemas.openxmlformats.org/drawingml/2006/main">
@@ -892,7 +892,7 @@
           </a:p>
           <a:p xmlns:a="http://schemas.openxmlformats.org/drawingml/2006/main">
             <a:r>
-              <a:t>- validation/dry-run.md</a:t>
+              <a:t>- spec.md §9</a:t>
             </a:r>
           </a:p>
           <a:p xmlns:a="http://schemas.openxmlformats.org/drawingml/2006/main">
@@ -967,12 +967,17 @@
           <a:lstStyle xmlns:a="http://schemas.openxmlformats.org/drawingml/2006/main"/>
           <a:p xmlns:a="http://schemas.openxmlformats.org/drawingml/2006/main">
             <a:r>
-              <a:t>Chỉ nói 2–3 ưu tiên, không đọc roadmap dài.</a:t>
-            </a:r>
-          </a:p>
-          <a:p xmlns:a="http://schemas.openxmlformats.org/drawingml/2006/main">
-            <a:r>
-              <a:t>Sau validation, cập nhật mục 01 bằng theme lặp lại thật và slide 5 bằng thay đổi đã làm.</a:t>
+              <a:t>Chỉ nói 2-3 ưu tiên, không đọc roadmap dài.</a:t>
+            </a:r>
+          </a:p>
+          <a:p xmlns:a="http://schemas.openxmlformats.org/drawingml/2006/main">
+            <a:r>
+              <a:t>Ba ưu tiên đều trỏ về feedback hoặc failure chưa xử hết: mastery dài, state khó phân biệt, cần rerun validation.</a:t>
+            </a:r>
+          </a:p>
+          <a:p xmlns:a="http://schemas.openxmlformats.org/drawingml/2006/main">
+            <a:r>
+              <a:t>Bài học: AI trong học tập phải giúp người học biết khi nào nên tin và khi nào cần kiểm lại.</a:t>
             </a:r>
           </a:p>
           <a:p xmlns:a="http://schemas.openxmlformats.org/drawingml/2006/main">
@@ -992,12 +997,12 @@
           </a:p>
           <a:p xmlns:a="http://schemas.openxmlformats.org/drawingml/2006/main">
             <a:r>
+              <a:t>- validation/dry-run.md</a:t>
+            </a:r>
+          </a:p>
+          <a:p xmlns:a="http://schemas.openxmlformats.org/drawingml/2006/main">
+            <a:r>
               <a:t>- spec.md §7</a:t>
-            </a:r>
-          </a:p>
-          <a:p xmlns:a="http://schemas.openxmlformats.org/drawingml/2006/main">
-            <a:r>
-              <a:t>- 02-guide.md §5.1</a:t>
             </a:r>
           </a:p>
           <a:p xmlns:a="http://schemas.openxmlformats.org/drawingml/2006/main">
@@ -1070,7 +1075,7 @@
   </p:cSld>
   <p:clrMap bg1="lt1" tx1="dk1" bg2="lt2" tx2="dk2" accent1="accent1" accent2="accent2" accent3="accent3" accent4="accent4" accent5="accent5" accent6="accent6" hlink="hlink" folHlink="folHlink"/>
   <p:sldLayoutIdLst>
-    <p:sldLayoutId xmlns:r="http://schemas.openxmlformats.org/officeDocument/2006/relationships" id="2147483649" r:id="Rea90a5c231ff4a93"/>
+    <p:sldLayoutId xmlns:r="http://schemas.openxmlformats.org/officeDocument/2006/relationships" id="2147483649" r:id="Rf7b1050c4d35468c"/>
   </p:sldLayoutIdLst>
   <p:txStyles>
     <p:titleStyle>
@@ -3758,7 +3763,7 @@
                   <a:srgbClr val="64748B"/>
                 </a:solidFill>
               </a:rPr>
-              <a:t>GIẢI PHÁP + LIVE DEMO</a:t>
+              <a:t>GIẢI PHÁP &amp; DEMO LIVE</a:t>
             </a:r>
           </a:p>
         </p:txBody>
@@ -3809,7 +3814,7 @@
                   <a:srgbClr val="0B1628"/>
                 </a:solidFill>
               </a:rPr>
-              <a:t>Một lời gọi AI ở đúng quyết định trung tâm</a:t>
+              <a:t>Một lát cắt 60 giây: hỏi Tutor → kiểm nguồn → kiểm hiểu</a:t>
             </a:r>
           </a:p>
         </p:txBody>
@@ -3860,7 +3865,7 @@
                   <a:srgbClr val="64748B"/>
                 </a:solidFill>
               </a:rPr>
-              <a:t>Tutor và câu hỏi giữ mock; Mastery Classifier là AI thật.</a:t>
+              <a:t>Tutor, Micro-Check và Classifier đều gọi Gemini live · model gemini-3.5-flash-lite.</a:t>
             </a:r>
           </a:p>
         </p:txBody>
@@ -4353,7 +4358,7 @@
                   <a:srgbClr val="64748B"/>
                 </a:solidFill>
               </a:rPr>
-              <a:t>Học viên giải thích lại</a:t>
+              <a:t>AI sinh câu hỏi từ đúng trang</a:t>
             </a:r>
           </a:p>
         </p:txBody>
@@ -4574,7 +4579,7 @@
                   <a:srgbClr val="FFFFFF"/>
                 </a:solidFill>
               </a:rPr>
-              <a:t>AI quyết định</a:t>
+              <a:t>AI phân loại</a:t>
             </a:r>
           </a:p>
         </p:txBody>
@@ -4625,7 +4630,7 @@
                   <a:srgbClr val="B9F4ED"/>
                 </a:solidFill>
               </a:rPr>
-              <a:t>4 mastery states</a:t>
+              <a:t>understood / partial / misconception / insufficient</a:t>
             </a:r>
           </a:p>
         </p:txBody>
@@ -4897,7 +4902,7 @@
                   <a:srgbClr val="64748B"/>
                 </a:solidFill>
               </a:rPr>
-              <a:t>Một bước có nguồn</a:t>
+              <a:t>Gợi ý sửa có nguồn</a:t>
             </a:r>
           </a:p>
         </p:txBody>
@@ -5067,7 +5072,7 @@
                   <a:srgbClr val="0B1628"/>
                 </a:solidFill>
               </a:rPr>
-              <a:t>“Mỗi token nhìn tất cả token khác…”</a:t>
+              <a:t>Case chuẩn: giải thích đúng self-attention</a:t>
             </a:r>
           </a:p>
         </p:txBody>
@@ -5118,7 +5123,7 @@
                   <a:srgbClr val="1EAA72"/>
                 </a:solidFill>
               </a:rPr>
-              <a:t>Kỳ vọng: understood → Tiếp tục học</a:t>
+              <a:t>Kỳ vọng: understood → tiếp tục học</a:t>
             </a:r>
           </a:p>
         </p:txBody>
@@ -5286,7 +5291,7 @@
                   <a:srgbClr val="FFFFFF"/>
                 </a:solidFill>
               </a:rPr>
-              <a:t>“Self-attention đọc tuần tự…”</a:t>
+              <a:t>Case khó: đúng thuật ngữ nhưng sai quan hệ</a:t>
             </a:r>
           </a:p>
         </p:txBody>
@@ -5337,7 +5342,7 @@
                   <a:srgbClr val="33D6C5"/>
                 </a:solidFill>
               </a:rPr>
-              <a:t>Kỳ vọng: misconception — không bị thuật ngữ đánh lừa</a:t>
+              <a:t>Kỳ vọng: misconception · không cho understood</a:t>
             </a:r>
           </a:p>
         </p:txBody>
@@ -6313,7 +6318,7 @@
                   <a:srgbClr val="FFFFFF"/>
                 </a:solidFill>
               </a:rPr>
-              <a:t>Model tự suy diễn</a:t>
+              <a:t>Output insufficient từng bị</a:t>
             </a:r>
           </a:p>
           <a:p xmlns:a="http://schemas.openxmlformats.org/drawingml/2006/main">
@@ -6331,7 +6336,7 @@
                   <a:srgbClr val="FFFFFF"/>
                 </a:solidFill>
               </a:rPr>
-              <a:t>ý thiếu thành sai.</a:t>
+              <a:t>server từ chối.</a:t>
             </a:r>
           </a:p>
         </p:txBody>
@@ -6382,7 +6387,7 @@
                   <a:srgbClr val="B9F4ED"/>
                 </a:solidFill>
               </a:rPr>
-              <a:t>Sửa bằng rubric:</a:t>
+              <a:t>Sửa bằng rubric/schema:</a:t>
             </a:r>
           </a:p>
           <a:p xmlns:a="http://schemas.openxmlformats.org/drawingml/2006/main">
@@ -6753,7 +6758,7 @@
                   <a:srgbClr val="0B1628"/>
                 </a:solidFill>
               </a:rPr>
-              <a:t>5 người thử: flow có giá trị, hai điểm cần rõ hơn</a:t>
+              <a:t>5 người ngoài nhóm thử: flow có giá trị, CTA và mastery cần rõ hơn</a:t>
             </a:r>
           </a:p>
         </p:txBody>
@@ -6804,7 +6809,7 @@
                   <a:srgbClr val="64748B"/>
                 </a:solidFill>
               </a:rPr>
-              <a:t>4/5 tự hoàn thành · 5/5 tin hoặc khá tin · 5/5 nói sẽ dùng thật</a:t>
+              <a:t>4/5 tự hoàn thành · 5/5 tin/khá tin · 5/5 nói sẽ dùng thật</a:t>
             </a:r>
           </a:p>
         </p:txBody>
@@ -7025,7 +7030,7 @@
                   <a:srgbClr val="64748B"/>
                 </a:solidFill>
               </a:rPr>
-              <a:t>người ngoài nhóm đã thử</a:t>
+              <a:t>người ngoài nhóm đã thử prototype</a:t>
             </a:r>
           </a:p>
         </p:txBody>
@@ -7107,7 +7112,7 @@
                   <a:srgbClr val="64748B"/>
                 </a:solidFill>
               </a:rPr>
-              <a:t>“Mình không rõ Partial khác Misconception ở mức nào.” — Huy, HV AI</a:t>
+              <a:t>“Mình không rõ Partial khác Misconception ở mức nào.” — Huy, học viên AI</a:t>
             </a:r>
           </a:p>
         </p:txBody>
@@ -7158,7 +7163,7 @@
                   <a:srgbClr val="64748B"/>
                 </a:solidFill>
               </a:rPr>
-              <a:t>“Mình tưởng cuộc hội thoại kết thúc sau khi AI trả lời.” — Lan, SV năm 2</a:t>
+              <a:t>“Mình tưởng cuộc hội thoại kết thúc sau khi AI trả lời.” — Lan, sinh viên năm 2</a:t>
             </a:r>
           </a:p>
         </p:txBody>
@@ -7377,7 +7382,7 @@
                   <a:srgbClr val="FFFFFF"/>
                 </a:solidFill>
               </a:rPr>
-              <a:t>CTA “Kiểm tra tôi” nổi bật</a:t>
+              <a:t>CTA “Kiểm tra tôi” nổi bật hơn</a:t>
             </a:r>
           </a:p>
         </p:txBody>
@@ -7512,7 +7517,7 @@
                   <a:srgbClr val="FFFFFF"/>
                 </a:solidFill>
               </a:rPr>
-              <a:t>Giải nghĩa 4 mastery state</a:t>
+              <a:t>Định nghĩa 4 mastery state</a:t>
             </a:r>
           </a:p>
         </p:txBody>
@@ -7647,7 +7652,7 @@
                   <a:srgbClr val="FFFFFF"/>
                 </a:solidFill>
               </a:rPr>
-              <a:t>4/5 tự hoàn thành flow</a:t>
+              <a:t>Nhãn: Điểm cần sửa / Kết luận</a:t>
             </a:r>
           </a:p>
         </p:txBody>
@@ -7782,7 +7787,7 @@
                   <a:srgbClr val="FFFFFF"/>
                 </a:solidFill>
               </a:rPr>
-              <a:t>5:08 · cần cắt 8 giây</a:t>
+              <a:t>Không tự bật Micro-Check: giữ quyền chủ động</a:t>
             </a:r>
           </a:p>
         </p:txBody>
@@ -7833,7 +7838,7 @@
                   <a:srgbClr val="64748B"/>
                 </a:solidFill>
               </a:rPr>
-              <a:t>Nguồn: validation/feedback-log.md · summary.md · dry-run.md</a:t>
+              <a:t>Nguồn: validation/feedback-log.md · validation/summary.md · spec.md §9</a:t>
             </a:r>
           </a:p>
         </p:txBody>
@@ -7997,7 +8002,7 @@
                   <a:srgbClr val="FFFFFF"/>
                 </a:solidFill>
               </a:rPr>
-              <a:t>Nếu có thêm một tuần</a:t>
+              <a:t>Nếu có thêm 1 tuần</a:t>
             </a:r>
           </a:p>
         </p:txBody>
@@ -8048,7 +8053,7 @@
                   <a:srgbClr val="B9F4ED"/>
                 </a:solidFill>
               </a:rPr>
-              <a:t>Chỉ ưu tiên việc trỏ được về feedback hoặc failure.</a:t>
+              <a:t>Dry run hiện tại: 5 phút 08 giây · cần cắt ít nhất 8 giây trước demo.</a:t>
             </a:r>
           </a:p>
         </p:txBody>
@@ -8183,7 +8188,7 @@
                   <a:srgbClr val="FFFFFF"/>
                 </a:solidFill>
               </a:rPr>
-              <a:t>Chốt UX từ 5 user test</a:t>
+              <a:t>Rút ngắn giải thích mastery</a:t>
             </a:r>
           </a:p>
         </p:txBody>
@@ -8234,7 +8239,7 @@
                   <a:srgbClr val="AFC0D5"/>
                 </a:solidFill>
               </a:rPr>
-              <a:t>Sửa nhãn/nút hoặc căn cứ ở điểm ≥2 người mắc.</a:t>
+              <a:t>3/5 người cần kết quả ngắn hơn và rõ hơn.</a:t>
             </a:r>
           </a:p>
         </p:txBody>
@@ -8369,7 +8374,7 @@
                   <a:srgbClr val="FFFFFF"/>
                 </a:solidFill>
               </a:rPr>
-              <a:t>Stress-test ngoài 24 case</a:t>
+              <a:t>Thêm tooltip/ví dụ cho state</a:t>
             </a:r>
           </a:p>
         </p:txBody>
@@ -8420,7 +8425,7 @@
                   <a:srgbClr val="AFC0D5"/>
                 </a:solidFill>
               </a:rPr>
-              <a:t>Thêm câu cụt, typo, trộn Anh–Việt và domain mới.</a:t>
+              <a:t>Giúp phân biệt partial, misconception và insufficient.</a:t>
             </a:r>
           </a:p>
         </p:txBody>
@@ -8555,7 +8560,7 @@
                   <a:srgbClr val="FFFFFF"/>
                 </a:solidFill>
               </a:rPr>
-              <a:t>Theo dõi calibration</a:t>
+              <a:t>Validation vòng hai</a:t>
             </a:r>
           </a:p>
         </p:txBody>
@@ -8606,7 +8611,7 @@
                   <a:srgbClr val="AFC0D5"/>
                 </a:solidFill>
               </a:rPr>
-              <a:t>Đo khi nào user tin quá mức hoặc phản đối verdict.</a:t>
+              <a:t>Đo lại sau khi sửa CTA và nhãn verdict.</a:t>
             </a:r>
           </a:p>
         </p:txBody>
@@ -8741,7 +8746,7 @@
                   <a:srgbClr val="0B1628"/>
                 </a:solidFill>
               </a:rPr>
-              <a:t>AI đáng tin</a:t>
+              <a:t>AI product tốt</a:t>
             </a:r>
           </a:p>
           <a:p xmlns:a="http://schemas.openxmlformats.org/drawingml/2006/main">
@@ -8759,7 +8764,7 @@
                   <a:srgbClr val="0B1628"/>
                 </a:solidFill>
               </a:rPr>
-              <a:t>không phải AI</a:t>
+              <a:t>không chỉ là AI</a:t>
             </a:r>
           </a:p>
           <a:p xmlns:a="http://schemas.openxmlformats.org/drawingml/2006/main">
@@ -8777,7 +8782,7 @@
                   <a:srgbClr val="0B1628"/>
                 </a:solidFill>
               </a:rPr>
-              <a:t>luôn trả lời.</a:t>
+              <a:t>trả lời đúng.</a:t>
             </a:r>
           </a:p>
         </p:txBody>
@@ -8859,7 +8864,7 @@
                   <a:srgbClr val="64748B"/>
                 </a:solidFill>
               </a:rPr>
-              <a:t>Mà là AI biết dừng,</a:t>
+              <a:t>Mà là giúp người học biết</a:t>
             </a:r>
           </a:p>
           <a:p xmlns:a="http://schemas.openxmlformats.org/drawingml/2006/main">
@@ -8877,7 +8882,7 @@
                   <a:srgbClr val="64748B"/>
                 </a:solidFill>
               </a:rPr>
-              <a:t>cho xem căn cứ và</a:t>
+              <a:t>khi nào nên tin và</a:t>
             </a:r>
           </a:p>
           <a:p xmlns:a="http://schemas.openxmlformats.org/drawingml/2006/main">
@@ -8895,7 +8900,7 @@
                   <a:srgbClr val="64748B"/>
                 </a:solidFill>
               </a:rPr>
-              <a:t>để người học sửa.</a:t>
+              <a:t>khi nào cần kiểm lại.</a:t>
             </a:r>
           </a:p>
         </p:txBody>
